--- a/presentations/b14-compliance/B14_Compliance_Narrated.pptx
+++ b/presentations/b14-compliance/B14_Compliance_Narrated.pptx
@@ -185,7 +185,7 @@
     </p:spTree>
     <p:extLst>
       <p:ext uri="{BB962C8B-B14F-4D97-AF65-F5344CB8AC3E}">
-        <p14:creationId xmlns:p14="http://schemas.microsoft.com/office/powerpoint/2010/main" val="645888884"/>
+        <p14:creationId xmlns:p14="http://schemas.microsoft.com/office/powerpoint/2010/main" val="4233696703"/>
       </p:ext>
     </p:extLst>
   </p:cSld>
@@ -2428,7 +2428,7 @@
             <a:hlinkClick r:id="" action="ppaction://media"/>
             <a:extLst>
               <a:ext uri="{FF2B5EF4-FFF2-40B4-BE49-F238E27FC236}">
-                <a16:creationId xmlns:a16="http://schemas.microsoft.com/office/drawing/2014/main" id="{E782768B-F65C-1E97-C2BA-60EF6CF934CF}"/>
+                <a16:creationId xmlns:a16="http://schemas.microsoft.com/office/drawing/2014/main" id="{78071E53-BE28-571D-EF3F-FBFFB77BADE3}"/>
               </a:ext>
             </a:extLst>
           </p:cNvPr>
@@ -2444,7 +2444,7 @@
                     <p:ext uri="{3AFAAA56-56D3-431D-BCD4-E75A35582382}">
                       <p173:tracksInfo xmlns:p173="http://schemas.microsoft.com/office/powerpoint/2017/3/main" displayLoc="slide">
                         <p173:trackLst>
-                          <p173:track id="{8E0CEBC9-F082-4B94-BA6A-94D2B598B7B7}" label="English (captions)" lang="en-US" r:embed="rId6"/>
+                          <p173:track id="{D2A0068D-4084-4C26-9DFC-52047EDD2872}" label="English (captions)" lang="en-US" r:embed="rId6"/>
                         </p173:trackLst>
                       </p173:tracksInfo>
                     </p:ext>
@@ -2462,7 +2462,7 @@
         </p:blipFill>
         <p:spPr>
           <a:xfrm>
-            <a:off x="127000" y="6350000"/>
+            <a:off x="12446000" y="127000"/>
             <a:ext cx="304800" cy="304800"/>
           </a:xfrm>
           <a:prstGeom prst="rect">
@@ -4464,7 +4464,7 @@
             <a:hlinkClick r:id="" action="ppaction://media"/>
             <a:extLst>
               <a:ext uri="{FF2B5EF4-FFF2-40B4-BE49-F238E27FC236}">
-                <a16:creationId xmlns:a16="http://schemas.microsoft.com/office/drawing/2014/main" id="{FC3F893A-39A2-BFA5-A235-ADB284646119}"/>
+                <a16:creationId xmlns:a16="http://schemas.microsoft.com/office/drawing/2014/main" id="{DDB1E2B4-B00B-86E5-54C0-A8993E46BE4C}"/>
               </a:ext>
             </a:extLst>
           </p:cNvPr>
@@ -4480,7 +4480,7 @@
                     <p:ext uri="{3AFAAA56-56D3-431D-BCD4-E75A35582382}">
                       <p173:tracksInfo xmlns:p173="http://schemas.microsoft.com/office/powerpoint/2017/3/main" displayLoc="slide">
                         <p173:trackLst>
-                          <p173:track id="{B625B8FD-1B5F-4E04-875D-6FABB4A66D0E}" label="English (captions)" lang="en-US" r:embed="rId8"/>
+                          <p173:track id="{4279DDD5-DF5B-42D2-A8C4-645FA6A0DF52}" label="English (captions)" lang="en-US" r:embed="rId8"/>
                         </p173:trackLst>
                       </p173:tracksInfo>
                     </p:ext>
@@ -4498,7 +4498,7 @@
         </p:blipFill>
         <p:spPr>
           <a:xfrm>
-            <a:off x="127000" y="6350000"/>
+            <a:off x="12446000" y="127000"/>
             <a:ext cx="304800" cy="304800"/>
           </a:xfrm>
           <a:prstGeom prst="rect">
@@ -5811,7 +5811,7 @@
             <a:hlinkClick r:id="" action="ppaction://media"/>
             <a:extLst>
               <a:ext uri="{FF2B5EF4-FFF2-40B4-BE49-F238E27FC236}">
-                <a16:creationId xmlns:a16="http://schemas.microsoft.com/office/drawing/2014/main" id="{3B5A9BF4-2FBB-38DE-BD0C-3D26D6D51EF6}"/>
+                <a16:creationId xmlns:a16="http://schemas.microsoft.com/office/drawing/2014/main" id="{930207A5-8495-A7B6-46E0-C5DB6F6D4173}"/>
               </a:ext>
             </a:extLst>
           </p:cNvPr>
@@ -5827,7 +5827,7 @@
                     <p:ext uri="{3AFAAA56-56D3-431D-BCD4-E75A35582382}">
                       <p173:tracksInfo xmlns:p173="http://schemas.microsoft.com/office/powerpoint/2017/3/main" displayLoc="slide">
                         <p173:trackLst>
-                          <p173:track id="{39AAB59F-C0D4-4379-B290-163F6C3B8BF6}" label="English (captions)" lang="en-US" r:embed="rId9"/>
+                          <p173:track id="{4F86A97B-11A3-40B8-85E1-6CB6B1C1FF68}" label="English (captions)" lang="en-US" r:embed="rId9"/>
                         </p173:trackLst>
                       </p173:tracksInfo>
                     </p:ext>
@@ -5845,7 +5845,7 @@
         </p:blipFill>
         <p:spPr>
           <a:xfrm>
-            <a:off x="127000" y="6350000"/>
+            <a:off x="12446000" y="127000"/>
             <a:ext cx="304800" cy="304800"/>
           </a:xfrm>
           <a:prstGeom prst="rect">
@@ -7038,7 +7038,7 @@
             <a:hlinkClick r:id="" action="ppaction://media"/>
             <a:extLst>
               <a:ext uri="{FF2B5EF4-FFF2-40B4-BE49-F238E27FC236}">
-                <a16:creationId xmlns:a16="http://schemas.microsoft.com/office/drawing/2014/main" id="{8614A660-AE0B-95A6-41E7-11B1207FC564}"/>
+                <a16:creationId xmlns:a16="http://schemas.microsoft.com/office/drawing/2014/main" id="{752F11EF-6B3C-BF2F-73B4-4AE33206254E}"/>
               </a:ext>
             </a:extLst>
           </p:cNvPr>
@@ -7054,7 +7054,7 @@
                     <p:ext uri="{3AFAAA56-56D3-431D-BCD4-E75A35582382}">
                       <p173:tracksInfo xmlns:p173="http://schemas.microsoft.com/office/powerpoint/2017/3/main" displayLoc="slide">
                         <p173:trackLst>
-                          <p173:track id="{FD278097-D9FD-4834-95BE-178C2C3666AC}" label="English (captions)" lang="en-US" r:embed="rId8"/>
+                          <p173:track id="{00C59443-DC27-4A85-BA13-C427853F2CB5}" label="English (captions)" lang="en-US" r:embed="rId8"/>
                         </p173:trackLst>
                       </p173:tracksInfo>
                     </p:ext>
@@ -7072,7 +7072,7 @@
         </p:blipFill>
         <p:spPr>
           <a:xfrm>
-            <a:off x="127000" y="6350000"/>
+            <a:off x="12446000" y="127000"/>
             <a:ext cx="304800" cy="304800"/>
           </a:xfrm>
           <a:prstGeom prst="rect">
@@ -8141,7 +8141,7 @@
             <a:hlinkClick r:id="" action="ppaction://media"/>
             <a:extLst>
               <a:ext uri="{FF2B5EF4-FFF2-40B4-BE49-F238E27FC236}">
-                <a16:creationId xmlns:a16="http://schemas.microsoft.com/office/drawing/2014/main" id="{2665316A-1578-E343-C2D8-3ED31B4BF1DC}"/>
+                <a16:creationId xmlns:a16="http://schemas.microsoft.com/office/drawing/2014/main" id="{EEF77831-6F9A-3951-108A-15907B0C03E5}"/>
               </a:ext>
             </a:extLst>
           </p:cNvPr>
@@ -8157,7 +8157,7 @@
                     <p:ext uri="{3AFAAA56-56D3-431D-BCD4-E75A35582382}">
                       <p173:tracksInfo xmlns:p173="http://schemas.microsoft.com/office/powerpoint/2017/3/main" displayLoc="slide">
                         <p173:trackLst>
-                          <p173:track id="{02B4769E-1633-4C1F-8DE7-F3D86F7AD36F}" label="English (captions)" lang="en-US" r:embed="rId11"/>
+                          <p173:track id="{56666D50-C0F2-4DE7-B164-EDC5121AE9C5}" label="English (captions)" lang="en-US" r:embed="rId11"/>
                         </p173:trackLst>
                       </p173:tracksInfo>
                     </p:ext>
@@ -8175,7 +8175,7 @@
         </p:blipFill>
         <p:spPr>
           <a:xfrm>
-            <a:off x="127000" y="6350000"/>
+            <a:off x="12446000" y="127000"/>
             <a:ext cx="304800" cy="304800"/>
           </a:xfrm>
           <a:prstGeom prst="rect">
@@ -9755,7 +9755,7 @@
             <a:hlinkClick r:id="" action="ppaction://media"/>
             <a:extLst>
               <a:ext uri="{FF2B5EF4-FFF2-40B4-BE49-F238E27FC236}">
-                <a16:creationId xmlns:a16="http://schemas.microsoft.com/office/drawing/2014/main" id="{E5571A11-061D-4A8C-5922-A3FAE4D027E9}"/>
+                <a16:creationId xmlns:a16="http://schemas.microsoft.com/office/drawing/2014/main" id="{5DB2C058-C8F2-504D-8124-E6D4C7DEA57D}"/>
               </a:ext>
             </a:extLst>
           </p:cNvPr>
@@ -9771,7 +9771,7 @@
                     <p:ext uri="{3AFAAA56-56D3-431D-BCD4-E75A35582382}">
                       <p173:tracksInfo xmlns:p173="http://schemas.microsoft.com/office/powerpoint/2017/3/main" displayLoc="slide">
                         <p173:trackLst>
-                          <p173:track id="{0F1CB8F8-95B3-4AC7-8B0F-6805292C74BF}" label="English (captions)" lang="en-US" r:embed="rId8"/>
+                          <p173:track id="{D8607B88-6A0B-4EDC-B805-EECBE0E8FA45}" label="English (captions)" lang="en-US" r:embed="rId8"/>
                         </p173:trackLst>
                       </p173:tracksInfo>
                     </p:ext>
@@ -9789,7 +9789,7 @@
         </p:blipFill>
         <p:spPr>
           <a:xfrm>
-            <a:off x="127000" y="6350000"/>
+            <a:off x="12446000" y="127000"/>
             <a:ext cx="304800" cy="304800"/>
           </a:xfrm>
           <a:prstGeom prst="rect">
@@ -12424,7 +12424,7 @@
             <a:hlinkClick r:id="" action="ppaction://media"/>
             <a:extLst>
               <a:ext uri="{FF2B5EF4-FFF2-40B4-BE49-F238E27FC236}">
-                <a16:creationId xmlns:a16="http://schemas.microsoft.com/office/drawing/2014/main" id="{C7129004-D901-A2EB-A273-4A52EF786852}"/>
+                <a16:creationId xmlns:a16="http://schemas.microsoft.com/office/drawing/2014/main" id="{13E05565-2214-CAFE-34CF-81C951D047C1}"/>
               </a:ext>
             </a:extLst>
           </p:cNvPr>
@@ -12440,7 +12440,7 @@
                     <p:ext uri="{3AFAAA56-56D3-431D-BCD4-E75A35582382}">
                       <p173:tracksInfo xmlns:p173="http://schemas.microsoft.com/office/powerpoint/2017/3/main" displayLoc="slide">
                         <p173:trackLst>
-                          <p173:track id="{7E9613EC-82EB-4931-9A4F-954644ABAFF4}" label="English (captions)" lang="en-US" r:embed="rId8"/>
+                          <p173:track id="{9DA7CBDF-F1F6-4583-9450-3DA0C0F91354}" label="English (captions)" lang="en-US" r:embed="rId8"/>
                         </p173:trackLst>
                       </p173:tracksInfo>
                     </p:ext>
@@ -12458,7 +12458,7 @@
         </p:blipFill>
         <p:spPr>
           <a:xfrm>
-            <a:off x="127000" y="6350000"/>
+            <a:off x="12446000" y="127000"/>
             <a:ext cx="304800" cy="304800"/>
           </a:xfrm>
           <a:prstGeom prst="rect">
@@ -13771,7 +13771,7 @@
             <a:hlinkClick r:id="" action="ppaction://media"/>
             <a:extLst>
               <a:ext uri="{FF2B5EF4-FFF2-40B4-BE49-F238E27FC236}">
-                <a16:creationId xmlns:a16="http://schemas.microsoft.com/office/drawing/2014/main" id="{FFA36F91-489B-3674-5179-4CACE82FA1A8}"/>
+                <a16:creationId xmlns:a16="http://schemas.microsoft.com/office/drawing/2014/main" id="{6DE98836-1E3C-311C-B589-E58AE546C20C}"/>
               </a:ext>
             </a:extLst>
           </p:cNvPr>
@@ -13787,7 +13787,7 @@
                     <p:ext uri="{3AFAAA56-56D3-431D-BCD4-E75A35582382}">
                       <p173:tracksInfo xmlns:p173="http://schemas.microsoft.com/office/powerpoint/2017/3/main" displayLoc="slide">
                         <p173:trackLst>
-                          <p173:track id="{320891F9-011A-4F6E-8127-384B11D12F66}" label="English (captions)" lang="en-US" r:embed="rId9"/>
+                          <p173:track id="{04FA34B8-82AE-40F5-8BAC-19C63177EA42}" label="English (captions)" lang="en-US" r:embed="rId9"/>
                         </p173:trackLst>
                       </p173:tracksInfo>
                     </p:ext>
@@ -13805,7 +13805,7 @@
         </p:blipFill>
         <p:spPr>
           <a:xfrm>
-            <a:off x="127000" y="6350000"/>
+            <a:off x="12446000" y="127000"/>
             <a:ext cx="304800" cy="304800"/>
           </a:xfrm>
           <a:prstGeom prst="rect">
@@ -14906,7 +14906,7 @@
             <a:hlinkClick r:id="" action="ppaction://media"/>
             <a:extLst>
               <a:ext uri="{FF2B5EF4-FFF2-40B4-BE49-F238E27FC236}">
-                <a16:creationId xmlns:a16="http://schemas.microsoft.com/office/drawing/2014/main" id="{AEB64E88-86B8-7332-86C0-4EFD636C5581}"/>
+                <a16:creationId xmlns:a16="http://schemas.microsoft.com/office/drawing/2014/main" id="{8B2186E7-87BD-84F9-B564-9038468D108D}"/>
               </a:ext>
             </a:extLst>
           </p:cNvPr>
@@ -14922,7 +14922,7 @@
                     <p:ext uri="{3AFAAA56-56D3-431D-BCD4-E75A35582382}">
                       <p173:tracksInfo xmlns:p173="http://schemas.microsoft.com/office/powerpoint/2017/3/main" displayLoc="slide">
                         <p173:trackLst>
-                          <p173:track id="{D9B6E705-DBFF-4ABD-BAB1-5EF2DEA1542F}" label="English (captions)" lang="en-US" r:embed="rId10"/>
+                          <p173:track id="{54E66909-B1CE-45C8-8EC5-0DD28E0CC551}" label="English (captions)" lang="en-US" r:embed="rId10"/>
                         </p173:trackLst>
                       </p173:tracksInfo>
                     </p:ext>
@@ -14940,7 +14940,7 @@
         </p:blipFill>
         <p:spPr>
           <a:xfrm>
-            <a:off x="127000" y="6350000"/>
+            <a:off x="12446000" y="127000"/>
             <a:ext cx="304800" cy="304800"/>
           </a:xfrm>
           <a:prstGeom prst="rect">
@@ -16181,7 +16181,7 @@
             <a:hlinkClick r:id="" action="ppaction://media"/>
             <a:extLst>
               <a:ext uri="{FF2B5EF4-FFF2-40B4-BE49-F238E27FC236}">
-                <a16:creationId xmlns:a16="http://schemas.microsoft.com/office/drawing/2014/main" id="{82931CF3-A0C3-0540-95E1-8690579F29E0}"/>
+                <a16:creationId xmlns:a16="http://schemas.microsoft.com/office/drawing/2014/main" id="{238586F1-642B-B1CA-760C-63CBA12DD867}"/>
               </a:ext>
             </a:extLst>
           </p:cNvPr>
@@ -16197,7 +16197,7 @@
                     <p:ext uri="{3AFAAA56-56D3-431D-BCD4-E75A35582382}">
                       <p173:tracksInfo xmlns:p173="http://schemas.microsoft.com/office/powerpoint/2017/3/main" displayLoc="slide">
                         <p173:trackLst>
-                          <p173:track id="{7E27D1DF-1377-4599-ACE3-3FA52DECD105}" label="English (captions)" lang="en-US" r:embed="rId8"/>
+                          <p173:track id="{09677FAD-F30F-4563-934A-9F43FE763F53}" label="English (captions)" lang="en-US" r:embed="rId8"/>
                         </p173:trackLst>
                       </p173:tracksInfo>
                     </p:ext>
@@ -16215,7 +16215,7 @@
         </p:blipFill>
         <p:spPr>
           <a:xfrm>
-            <a:off x="127000" y="6350000"/>
+            <a:off x="12446000" y="127000"/>
             <a:ext cx="304800" cy="304800"/>
           </a:xfrm>
           <a:prstGeom prst="rect">
@@ -17164,7 +17164,7 @@
             <a:hlinkClick r:id="" action="ppaction://media"/>
             <a:extLst>
               <a:ext uri="{FF2B5EF4-FFF2-40B4-BE49-F238E27FC236}">
-                <a16:creationId xmlns:a16="http://schemas.microsoft.com/office/drawing/2014/main" id="{5864EF9E-7DEF-C86F-0498-D4CC1FD6FEB6}"/>
+                <a16:creationId xmlns:a16="http://schemas.microsoft.com/office/drawing/2014/main" id="{F7483042-6FED-5EDA-F3C9-8DB1320E8A7E}"/>
               </a:ext>
             </a:extLst>
           </p:cNvPr>
@@ -17180,7 +17180,7 @@
                     <p:ext uri="{3AFAAA56-56D3-431D-BCD4-E75A35582382}">
                       <p173:tracksInfo xmlns:p173="http://schemas.microsoft.com/office/powerpoint/2017/3/main" displayLoc="slide">
                         <p173:trackLst>
-                          <p173:track id="{80ECA95C-8AA3-40CF-85C5-3390E6C19FDA}" label="English (captions)" lang="en-US" r:embed="rId9"/>
+                          <p173:track id="{CF966730-3117-48F8-B407-1FD875567F22}" label="English (captions)" lang="en-US" r:embed="rId9"/>
                         </p173:trackLst>
                       </p173:tracksInfo>
                     </p:ext>
@@ -17198,7 +17198,7 @@
         </p:blipFill>
         <p:spPr>
           <a:xfrm>
-            <a:off x="127000" y="6350000"/>
+            <a:off x="12446000" y="127000"/>
             <a:ext cx="304800" cy="304800"/>
           </a:xfrm>
           <a:prstGeom prst="rect">
@@ -18147,7 +18147,7 @@
             <a:hlinkClick r:id="" action="ppaction://media"/>
             <a:extLst>
               <a:ext uri="{FF2B5EF4-FFF2-40B4-BE49-F238E27FC236}">
-                <a16:creationId xmlns:a16="http://schemas.microsoft.com/office/drawing/2014/main" id="{51AD1FB9-9301-7E18-ACB2-6FC66BE48FBA}"/>
+                <a16:creationId xmlns:a16="http://schemas.microsoft.com/office/drawing/2014/main" id="{660DF6AA-51E5-9722-47F5-EE744E6F4F43}"/>
               </a:ext>
             </a:extLst>
           </p:cNvPr>
@@ -18163,7 +18163,7 @@
                     <p:ext uri="{3AFAAA56-56D3-431D-BCD4-E75A35582382}">
                       <p173:tracksInfo xmlns:p173="http://schemas.microsoft.com/office/powerpoint/2017/3/main" displayLoc="slide">
                         <p173:trackLst>
-                          <p173:track id="{BC6D7D08-9A82-4AE4-BBD2-E3805E9B24DC}" label="English (captions)" lang="en-US" r:embed="rId9"/>
+                          <p173:track id="{59F274F4-694E-44CB-8D7B-B07CD37414B8}" label="English (captions)" lang="en-US" r:embed="rId9"/>
                         </p173:trackLst>
                       </p173:tracksInfo>
                     </p:ext>
@@ -18181,7 +18181,7 @@
         </p:blipFill>
         <p:spPr>
           <a:xfrm>
-            <a:off x="127000" y="6350000"/>
+            <a:off x="12446000" y="127000"/>
             <a:ext cx="304800" cy="304800"/>
           </a:xfrm>
           <a:prstGeom prst="rect">
@@ -19569,7 +19569,7 @@
             <a:hlinkClick r:id="" action="ppaction://media"/>
             <a:extLst>
               <a:ext uri="{FF2B5EF4-FFF2-40B4-BE49-F238E27FC236}">
-                <a16:creationId xmlns:a16="http://schemas.microsoft.com/office/drawing/2014/main" id="{BE164730-E7FA-D5AB-2D64-93D8DB96967E}"/>
+                <a16:creationId xmlns:a16="http://schemas.microsoft.com/office/drawing/2014/main" id="{564E270A-A010-DD33-55F5-6B8025C9B383}"/>
               </a:ext>
             </a:extLst>
           </p:cNvPr>
@@ -19585,7 +19585,7 @@
                     <p:ext uri="{3AFAAA56-56D3-431D-BCD4-E75A35582382}">
                       <p173:tracksInfo xmlns:p173="http://schemas.microsoft.com/office/powerpoint/2017/3/main" displayLoc="slide">
                         <p173:trackLst>
-                          <p173:track id="{9B377974-C04D-4667-B343-FCBAE6A2F970}" label="English (captions)" lang="en-US" r:embed="rId9"/>
+                          <p173:track id="{5C2BADF1-9835-4BB1-8457-791BF8C645E7}" label="English (captions)" lang="en-US" r:embed="rId9"/>
                         </p173:trackLst>
                       </p173:tracksInfo>
                     </p:ext>
@@ -19603,7 +19603,7 @@
         </p:blipFill>
         <p:spPr>
           <a:xfrm>
-            <a:off x="127000" y="6350000"/>
+            <a:off x="12446000" y="127000"/>
             <a:ext cx="304800" cy="304800"/>
           </a:xfrm>
           <a:prstGeom prst="rect">
